--- a/Proyecto_MIS/Presentación/Virvuto_Presentacion_MIS (1).pptx
+++ b/Proyecto_MIS/Presentación/Virvuto_Presentacion_MIS (1).pptx
@@ -4663,7 +4663,7 @@
                 <a:ea typeface="Calibri" pitchFamily="34" charset="-122"/>
                 <a:cs typeface="Calibri" pitchFamily="34" charset="-120"/>
               </a:rPr>
-              <a:t>: 45,588 $</a:t>
+              <a:t>: 40,000 $</a:t>
             </a:r>
             <a:endParaRPr lang="en-US" sz="2800" dirty="0"/>
           </a:p>
@@ -4770,23 +4770,6 @@
         <p:txBody>
           <a:bodyPr wrap="square" rtlCol="0" anchor="t"/>
           <a:lstStyle/>
-          <a:p>
-            <a:pPr marL="0" indent="0">
-              <a:buNone/>
-            </a:pPr>
-            <a:r>
-              <a:rPr lang="en-US" sz="1150" dirty="0">
-                <a:solidFill>
-                  <a:srgbClr val="1E2761"/>
-                </a:solidFill>
-                <a:latin typeface="Calibri" pitchFamily="34" charset="0"/>
-                <a:ea typeface="Calibri" pitchFamily="34" charset="-122"/>
-                <a:cs typeface="Calibri" pitchFamily="34" charset="-120"/>
-              </a:rPr>
-              <a:t>✅  ETL + limpieza de 31,001 registros</a:t>
-            </a:r>
-            <a:endParaRPr lang="en-US" sz="1150" dirty="0"/>
-          </a:p>
           <a:p>
             <a:pPr marL="0" indent="0">
               <a:buNone/>
